--- a/Ictiosis_epidermolitica_pacientes_20min.pptx
+++ b/Ictiosis_epidermolitica_pacientes_20min.pptx
@@ -1544,7 +1544,8 @@
 Abajo del todo, en la capa basal, se fabrican la queratina 5 y la 14. Si fallan esas, la enfermedad es la epidermólisis ampollosa simple.
 En cuanto la célula sube y empieza a diferenciarse, apaga esas y enciende la queratina 1 y la 10. Si fallan estas, la enfermedad es la ictiosis epidermolítica. Estas son las nuestras.
 Un poco más arriba, ya en la diferenciación tardía, se enciende además la queratina 2: si falla, sale la ictiosis epidermolítica superficial, más leve, porque la rotura ocurre más cerca de la superficie.
-Esto explica algo que confunde mucho en consulta: son enfermedades primas hermanas, con el mismo mecanismo de fondo, y el nombre y la gravedad cambian según a qué altura del edificio está el fallo.</a:t>
+Esto explica algo que confunde mucho en consulta: son enfermedades primas hermanas, con el mismo mecanismo de fondo, y el nombre y la gravedad cambian según a qué altura del edificio está el fallo.
+[POR SI ALGUIEN PREGUNTA POR EL NOMBRE NUEVO. Desde 2025 estas enfermedades se nombran por el gen causante, dentro de los llamados trastornos de la diferenciación epidérmica (EDD). La ictiosis epidermolítica pasa a ser KRT1-nEDD o KRT10-nEDD según la queratina afectada, y la superficial, KRT2-nEDD. Es exactamente la misma enfermedad: lo único que cambia es el nombre, que ahora se construye con el gen. El cambio viene de la serie del British Journal of Dermatology de 2025 (Akiyama y cols. para los no sindrómicos), y uno de los motivos que dan los autores es dejar atrás términos considerados peyorativos, como "ictiosis", que viene del griego pez, o "arlequín". Si sale el tema no le daría más de medio minuto, pero conviene tenerlo a mano: es posible que alguien lo haya visto en un informe reciente y se haya asustado pensando que le han cambiado el diagnóstico.]</a:t>
             </a:r>
             <a:endParaRPr lang="en-US" dirty="0"/>
           </a:p>
